--- a/demo2/template.pptx
+++ b/demo2/template.pptx
@@ -5298,7 +5298,7 @@
         <p:spPr>
           <a:xfrm>
             <a:off x="0" y="0"/>
-            <a:ext cx="12188952" cy="822960"/>
+            <a:ext cx="12188952" cy="777240"/>
           </a:xfrm>
           <a:prstGeom prst="rect">
             <a:avLst/>
@@ -5340,7 +5340,7 @@
         </p:nvSpPr>
         <p:spPr>
           <a:xfrm>
-            <a:off x="457200" y="137160"/>
+            <a:off x="457200" y="109728"/>
             <a:ext cx="10972800" cy="548640"/>
           </a:xfrm>
           <a:prstGeom prst="rect">
@@ -5362,21 +5362,107 @@
                 </a:solidFill>
                 <a:latin typeface="Arial"/>
               </a:rPr>
-              <a:t>2 Background</a:t>
-            </a:r>
-          </a:p>
-        </p:txBody>
-      </p:sp>
-      <p:sp>
-        <p:nvSpPr>
-          <p:cNvPr id="5" name="TextBox 4"/>
+              <a:t>2 Section Title</a:t>
+            </a:r>
+          </a:p>
+        </p:txBody>
+      </p:sp>
+      <p:sp>
+        <p:nvSpPr>
+          <p:cNvPr id="5" name="Rectangle 4"/>
+          <p:cNvSpPr/>
+          <p:nvPr/>
+        </p:nvSpPr>
+        <p:spPr>
+          <a:xfrm>
+            <a:off x="274320" y="201168"/>
+            <a:ext cx="109728" cy="384048"/>
+          </a:xfrm>
+          <a:prstGeom prst="rect">
+            <a:avLst/>
+          </a:prstGeom>
+          <a:solidFill>
+            <a:srgbClr val="E63946"/>
+          </a:solidFill>
+          <a:ln>
+            <a:noFill/>
+          </a:ln>
+        </p:spPr>
+        <p:style>
+          <a:lnRef idx="1">
+            <a:schemeClr val="accent1"/>
+          </a:lnRef>
+          <a:fillRef idx="3">
+            <a:schemeClr val="accent1"/>
+          </a:fillRef>
+          <a:effectRef idx="2">
+            <a:schemeClr val="accent1"/>
+          </a:effectRef>
+          <a:fontRef idx="minor">
+            <a:schemeClr val="lt1"/>
+          </a:fontRef>
+        </p:style>
+        <p:txBody>
+          <a:bodyPr rtlCol="0" anchor="ctr"/>
+          <a:lstStyle/>
+          <a:p>
+            <a:pPr algn="ctr"/>
+          </a:p>
+        </p:txBody>
+      </p:sp>
+      <p:sp>
+        <p:nvSpPr>
+          <p:cNvPr id="6" name="Rectangle 5"/>
+          <p:cNvSpPr/>
+          <p:nvPr/>
+        </p:nvSpPr>
+        <p:spPr>
+          <a:xfrm>
+            <a:off x="457200" y="640080"/>
+            <a:ext cx="11247120" cy="27432"/>
+          </a:xfrm>
+          <a:prstGeom prst="rect">
+            <a:avLst/>
+          </a:prstGeom>
+          <a:solidFill>
+            <a:srgbClr val="E63946"/>
+          </a:solidFill>
+          <a:ln>
+            <a:noFill/>
+          </a:ln>
+        </p:spPr>
+        <p:style>
+          <a:lnRef idx="1">
+            <a:schemeClr val="accent1"/>
+          </a:lnRef>
+          <a:fillRef idx="3">
+            <a:schemeClr val="accent1"/>
+          </a:fillRef>
+          <a:effectRef idx="2">
+            <a:schemeClr val="accent1"/>
+          </a:effectRef>
+          <a:fontRef idx="minor">
+            <a:schemeClr val="lt1"/>
+          </a:fontRef>
+        </p:style>
+        <p:txBody>
+          <a:bodyPr rtlCol="0" anchor="ctr"/>
+          <a:lstStyle/>
+          <a:p>
+            <a:pPr algn="ctr"/>
+          </a:p>
+        </p:txBody>
+      </p:sp>
+      <p:sp>
+        <p:nvSpPr>
+          <p:cNvPr id="7" name="TextBox 6"/>
           <p:cNvSpPr txBox="1"/>
           <p:nvPr/>
         </p:nvSpPr>
         <p:spPr>
           <a:xfrm>
-            <a:off x="731520" y="1188720"/>
-            <a:ext cx="10515600" cy="4572000"/>
+            <a:off x="731520" y="1097280"/>
+            <a:ext cx="5029200" cy="914400"/>
           </a:xfrm>
           <a:prstGeom prst="rect">
             <a:avLst/>
@@ -5391,23 +5477,58 @@
           <a:p>
             <a:pPr algn="l"/>
             <a:r>
-              <a:rPr sz="1800" b="0">
+              <a:rPr sz="1600" b="0">
+                <a:solidFill>
+                  <a:srgbClr val="888888"/>
+                </a:solidFill>
+                <a:latin typeface="Arial"/>
+              </a:rPr>
+              <a:t>Left column: images</a:t>
+            </a:r>
+          </a:p>
+        </p:txBody>
+      </p:sp>
+      <p:sp>
+        <p:nvSpPr>
+          <p:cNvPr id="8" name="TextBox 7"/>
+          <p:cNvSpPr txBox="1"/>
+          <p:nvPr/>
+        </p:nvSpPr>
+        <p:spPr>
+          <a:xfrm>
+            <a:off x="6400800" y="1097280"/>
+            <a:ext cx="5303520" cy="914400"/>
+          </a:xfrm>
+          <a:prstGeom prst="rect">
+            <a:avLst/>
+          </a:prstGeom>
+          <a:noFill/>
+        </p:spPr>
+        <p:txBody>
+          <a:bodyPr wrap="square">
+            <a:spAutoFit/>
+          </a:bodyPr>
+          <a:lstStyle/>
+          <a:p>
+            <a:pPr algn="l"/>
+            <a:r>
+              <a:rPr sz="1600" b="0">
                 <a:solidFill>
                   <a:srgbClr val="1A1A1A"/>
                 </a:solidFill>
                 <a:latin typeface="Arial"/>
               </a:rPr>
-              <a:t>Content area
-3 bullet points per page
-Images left, text right
-16pt Arial</a:t>
-            </a:r>
-          </a:p>
-        </p:txBody>
-      </p:sp>
-      <p:sp>
-        <p:nvSpPr>
-          <p:cNvPr id="6" name="Rectangle 5"/>
+              <a:t>Right column: bullet points
+● Point 1
+● Point 2
+● Point 3</a:t>
+            </a:r>
+          </a:p>
+        </p:txBody>
+      </p:sp>
+      <p:sp>
+        <p:nvSpPr>
+          <p:cNvPr id="9" name="Rectangle 8"/>
           <p:cNvSpPr/>
           <p:nvPr/>
         </p:nvSpPr>
